--- a/pitch/aeogeo_tech_deepdive_deck.pptx
+++ b/pitch/aeogeo_tech_deepdive_deck.pptx
@@ -3216,7 +3216,7 @@
                 </a:solidFill>
                 <a:latin typeface="Inter"/>
               </a:rPr>
-              <a:t>AEOGEO · ENGINEERING</a:t>
+              <a:t>AEOGEO · ENGINEERING DEEP-DIVE</a:t>
             </a:r>
           </a:p>
         </p:txBody>
@@ -3229,7 +3229,7 @@
         </p:nvSpPr>
         <p:spPr>
           <a:xfrm>
-            <a:off x="731520" y="2011680"/>
+            <a:off x="731520" y="1828800"/>
             <a:ext cx="10515600" cy="1280160"/>
           </a:xfrm>
           <a:prstGeom prst="rect">
@@ -3245,13 +3245,25 @@
           <a:p>
             <a:pPr algn="l"/>
             <a:r>
-              <a:rPr sz="5800" b="1">
+              <a:rPr sz="5200" b="1">
                 <a:solidFill>
                   <a:srgbClr val="E6EDF7"/>
                 </a:solidFill>
                 <a:latin typeface="Inter"/>
               </a:rPr>
-              <a:t>Engineering deep-dive</a:t>
+              <a:t>Safety-First RAG Engine:</a:t>
+            </a:r>
+          </a:p>
+          <a:p>
+            <a:pPr algn="l"/>
+            <a:r>
+              <a:rPr sz="5200" b="1">
+                <a:solidFill>
+                  <a:srgbClr val="E6EDF7"/>
+                </a:solidFill>
+                <a:latin typeface="Inter"/>
+              </a:rPr>
+              <a:t>How We Built It</a:t>
             </a:r>
           </a:p>
         </p:txBody>
@@ -3280,25 +3292,25 @@
           <a:p>
             <a:pPr algn="l"/>
             <a:r>
-              <a:rPr sz="2200" b="0">
+              <a:rPr sz="1900" b="0">
                 <a:solidFill>
                   <a:srgbClr val="8B97AA"/>
                 </a:solidFill>
                 <a:latin typeface="Inter"/>
               </a:rPr>
-              <a:t>How we turn a 165-page domain book into a Korean-native</a:t>
-            </a:r>
-          </a:p>
-          <a:p>
-            <a:pPr algn="l"/>
-            <a:r>
-              <a:rPr sz="2200" b="0">
+              <a:t>LangGraph + CrewAI 3-agent pipeline · 165-page OCR knowledge base</a:t>
+            </a:r>
+          </a:p>
+          <a:p>
+            <a:pPr algn="l"/>
+            <a:r>
+              <a:rPr sz="1900" b="0">
                 <a:solidFill>
                   <a:srgbClr val="8B97AA"/>
                 </a:solidFill>
                 <a:latin typeface="Inter"/>
               </a:rPr>
-              <a:t>RAG API that AI assistants actually cite.</a:t>
+              <a:t>Korean-native RAG API · Kill-Switch safety gate · AEO JSON-LD publishing</a:t>
             </a:r>
           </a:p>
         </p:txBody>
@@ -3312,7 +3324,7 @@
         <p:spPr>
           <a:xfrm>
             <a:off x="731520" y="4937760"/>
-            <a:ext cx="1645920" cy="292608"/>
+            <a:ext cx="2057400" cy="292608"/>
           </a:xfrm>
           <a:prstGeom prst="roundRect">
             <a:avLst>
@@ -3352,7 +3364,7 @@
                 </a:solidFill>
                 <a:latin typeface="Inter"/>
               </a:rPr>
-              <a:t>FastAPI · Ollama · Tesseract</a:t>
+              <a:t>FastAPI · Ollama · LangGraph · CrewAI</a:t>
             </a:r>
           </a:p>
         </p:txBody>
@@ -3365,7 +3377,7 @@
         </p:nvSpPr>
         <p:spPr>
           <a:xfrm>
-            <a:off x="3657600" y="4937760"/>
+            <a:off x="4572000" y="4937760"/>
             <a:ext cx="1097280" cy="292608"/>
           </a:xfrm>
           <a:prstGeom prst="roundRect">
@@ -3419,8 +3431,8 @@
         </p:nvSpPr>
         <p:spPr>
           <a:xfrm>
-            <a:off x="6126480" y="4937760"/>
-            <a:ext cx="777240" cy="292608"/>
+            <a:off x="7040880" y="4937760"/>
+            <a:ext cx="1417320" cy="292608"/>
           </a:xfrm>
           <a:prstGeom prst="roundRect">
             <a:avLst>
@@ -3460,7 +3472,7 @@
                 </a:solidFill>
                 <a:latin typeface="Inter"/>
               </a:rPr>
-              <a:t>AEO + GEO</a:t>
+              <a:t>AEO + GEO + Kill-Switch</a:t>
             </a:r>
           </a:p>
         </p:txBody>
@@ -5317,7 +5329,7 @@
                 </a:solidFill>
                 <a:latin typeface="Inter"/>
               </a:rPr>
-              <a:t>What's shipped, what's next</a:t>
+              <a:t>완료된 것, 다음 단계, 투자 후 마일스톤</a:t>
             </a:r>
           </a:p>
         </p:txBody>
@@ -5432,7 +5444,7 @@
                 </a:solidFill>
                 <a:latin typeface="Inter"/>
               </a:rPr>
-              <a:t>Scaffold + OCR pipeline</a:t>
+              <a:t>Scaffold + OCR pipeline (Tesseract+CV2)</a:t>
             </a:r>
           </a:p>
         </p:txBody>
@@ -5601,7 +5613,7 @@
                 </a:solidFill>
                 <a:latin typeface="Inter"/>
               </a:rPr>
-              <a:t>165-page intake (≈28k words indexed)</a:t>
+              <a:t>165-page intake · 28k words · 4 indexes</a:t>
             </a:r>
           </a:p>
         </p:txBody>
@@ -5770,7 +5782,7 @@
                 </a:solidFill>
                 <a:latin typeface="Inter"/>
               </a:rPr>
-              <a:t>elbee.yogaman.club brand · 8 yoga spots</a:t>
+              <a:t>elbee.yogaman.club · 8 yoga spots · AEO JSON-LD</a:t>
             </a:r>
           </a:p>
         </p:txBody>
@@ -5939,7 +5951,7 @@
                 </a:solidFill>
                 <a:latin typeface="Inter"/>
               </a:rPr>
-              <a:t>Multi-book expansion + manifest</a:t>
+              <a:t>LangGraph 3-agent crew · Kill-Switch gate</a:t>
             </a:r>
           </a:p>
         </p:txBody>
@@ -6108,7 +6120,7 @@
                 </a:solidFill>
                 <a:latin typeface="Inter"/>
               </a:rPr>
-              <a:t>GitHub Actions CI (OCR lint + JSON schema)</a:t>
+              <a:t>Pinecone vector index + semantic pose matching</a:t>
             </a:r>
           </a:p>
         </p:txBody>
@@ -6277,7 +6289,7 @@
                 </a:solidFill>
                 <a:latin typeface="Inter"/>
               </a:rPr>
-              <a:t>Employer demo package + live deploy</a:t>
+              <a:t>Naver Cue feed + 50-studio Seoul rollout</a:t>
             </a:r>
           </a:p>
         </p:txBody>
@@ -6411,7 +6423,7 @@
                 </a:solidFill>
                 <a:latin typeface="Inter"/>
               </a:rPr>
-              <a:t>OPEN ISSUES</a:t>
+              <a:t>TECHNICAL MOAT</a:t>
             </a:r>
           </a:p>
         </p:txBody>
@@ -6446,7 +6458,7 @@
                 </a:solidFill>
                 <a:latin typeface="Inter"/>
               </a:rPr>
-              <a:t>• #1  SSOT architecture (this deck's source)</a:t>
+              <a:t>• Kill-Switch safety gate (unique)</a:t>
             </a:r>
           </a:p>
         </p:txBody>
@@ -6481,7 +6493,7 @@
                 </a:solidFill>
                 <a:latin typeface="Inter"/>
               </a:rPr>
-              <a:t>• #3  60s vertical storyboard</a:t>
+              <a:t>• Agentic 3-crew per query</a:t>
             </a:r>
           </a:p>
         </p:txBody>
@@ -6516,7 +6528,7 @@
                 </a:solidFill>
                 <a:latin typeface="Inter"/>
               </a:rPr>
-              <a:t>• #4  Korean NLP + GEO techstack</a:t>
+              <a:t>• AEO JSON-LD by design</a:t>
             </a:r>
           </a:p>
         </p:txBody>
@@ -6524,6 +6536,76 @@
       <p:sp>
         <p:nvSpPr>
           <p:cNvPr id="35" name="TextBox 34"/>
+          <p:cNvSpPr txBox="1"/>
+          <p:nvPr/>
+        </p:nvSpPr>
+        <p:spPr>
+          <a:xfrm>
+            <a:off x="8366760" y="4023360"/>
+            <a:ext cx="3108960" cy="548640"/>
+          </a:xfrm>
+          <a:prstGeom prst="rect">
+            <a:avLst/>
+          </a:prstGeom>
+          <a:noFill/>
+        </p:spPr>
+        <p:txBody>
+          <a:bodyPr wrap="square" anchor="t" lIns="0" rIns="0" tIns="0" bIns="0">
+            <a:spAutoFit/>
+          </a:bodyPr>
+          <a:lstStyle/>
+          <a:p>
+            <a:pPr algn="l"/>
+            <a:r>
+              <a:rPr sz="1100" b="0">
+                <a:solidFill>
+                  <a:srgbClr val="E6EDF7"/>
+                </a:solidFill>
+                <a:latin typeface="Inter"/>
+              </a:rPr>
+              <a:t>• Zero-cost local inference</a:t>
+            </a:r>
+          </a:p>
+        </p:txBody>
+      </p:sp>
+      <p:sp>
+        <p:nvSpPr>
+          <p:cNvPr id="36" name="TextBox 35"/>
+          <p:cNvSpPr txBox="1"/>
+          <p:nvPr/>
+        </p:nvSpPr>
+        <p:spPr>
+          <a:xfrm>
+            <a:off x="8366760" y="4572000"/>
+            <a:ext cx="3108960" cy="548640"/>
+          </a:xfrm>
+          <a:prstGeom prst="rect">
+            <a:avLst/>
+          </a:prstGeom>
+          <a:noFill/>
+        </p:spPr>
+        <p:txBody>
+          <a:bodyPr wrap="square" anchor="t" lIns="0" rIns="0" tIns="0" bIns="0">
+            <a:spAutoFit/>
+          </a:bodyPr>
+          <a:lstStyle/>
+          <a:p>
+            <a:pPr algn="l"/>
+            <a:r>
+              <a:rPr sz="1100" b="0">
+                <a:solidFill>
+                  <a:srgbClr val="E6EDF7"/>
+                </a:solidFill>
+                <a:latin typeface="Inter"/>
+              </a:rPr>
+              <a:t>• Anatomical pose index</a:t>
+            </a:r>
+          </a:p>
+        </p:txBody>
+      </p:sp>
+      <p:sp>
+        <p:nvSpPr>
+          <p:cNvPr id="37" name="TextBox 36"/>
           <p:cNvSpPr txBox="1"/>
           <p:nvPr/>
         </p:nvSpPr>
@@ -6558,7 +6640,7 @@
       </p:sp>
       <p:sp>
         <p:nvSpPr>
-          <p:cNvPr id="36" name="TextBox 35"/>
+          <p:cNvPr id="38" name="TextBox 37"/>
           <p:cNvSpPr txBox="1"/>
           <p:nvPr/>
         </p:nvSpPr>
@@ -6703,7 +6785,7 @@
         </p:nvSpPr>
         <p:spPr>
           <a:xfrm>
-            <a:off x="731520" y="2194560"/>
+            <a:off x="731520" y="1828800"/>
             <a:ext cx="10515600" cy="1280160"/>
           </a:xfrm>
           <a:prstGeom prst="rect">
@@ -6719,7 +6801,7 @@
           <a:p>
             <a:pPr algn="l"/>
             <a:r>
-              <a:rPr sz="5800" b="1">
+              <a:rPr sz="5000" b="1">
                 <a:solidFill>
                   <a:srgbClr val="E6EDF7"/>
                 </a:solidFill>
@@ -6728,6 +6810,18 @@
               <a:t>Built local-first.</a:t>
             </a:r>
           </a:p>
+          <a:p>
+            <a:pPr algn="l"/>
+            <a:r>
+              <a:rPr sz="5000" b="1">
+                <a:solidFill>
+                  <a:srgbClr val="E6EDF7"/>
+                </a:solidFill>
+                <a:latin typeface="Inter"/>
+              </a:rPr>
+              <a:t>Safety-first. AEO-native.</a:t>
+            </a:r>
+          </a:p>
         </p:txBody>
       </p:sp>
       <p:sp>
@@ -6738,7 +6832,7 @@
         </p:nvSpPr>
         <p:spPr>
           <a:xfrm>
-            <a:off x="731520" y="3383280"/>
+            <a:off x="731520" y="3474720"/>
             <a:ext cx="10515600" cy="914400"/>
           </a:xfrm>
           <a:prstGeom prst="rect">
@@ -6756,24 +6850,59 @@
             <a:r>
               <a:rPr sz="2200" b="0">
                 <a:solidFill>
+                  <a:srgbClr val="3DD9C2"/>
+                </a:solidFill>
+                <a:latin typeface="Inter"/>
+              </a:rPr>
+              <a:t>Korean-native · Cited by AI · Ready to scale globally.</a:t>
+            </a:r>
+          </a:p>
+        </p:txBody>
+      </p:sp>
+      <p:sp>
+        <p:nvSpPr>
+          <p:cNvPr id="6" name="TextBox 5"/>
+          <p:cNvSpPr txBox="1"/>
+          <p:nvPr/>
+        </p:nvSpPr>
+        <p:spPr>
+          <a:xfrm>
+            <a:off x="731520" y="4389120"/>
+            <a:ext cx="10515600" cy="731520"/>
+          </a:xfrm>
+          <a:prstGeom prst="rect">
+            <a:avLst/>
+          </a:prstGeom>
+          <a:noFill/>
+        </p:spPr>
+        <p:txBody>
+          <a:bodyPr wrap="square" anchor="t" lIns="0" rIns="0" tIns="0" bIns="0">
+            <a:spAutoFit/>
+          </a:bodyPr>
+          <a:lstStyle/>
+          <a:p>
+            <a:pPr algn="l"/>
+            <a:r>
+              <a:rPr sz="1500" b="0">
+                <a:solidFill>
                   <a:srgbClr val="8B97AA"/>
                 </a:solidFill>
                 <a:latin typeface="Inter"/>
               </a:rPr>
-              <a:t>Korean-native. Cited by AI. Ready to scale.</a:t>
-            </a:r>
-          </a:p>
-        </p:txBody>
-      </p:sp>
-      <p:sp>
-        <p:nvSpPr>
-          <p:cNvPr id="6" name="Rounded Rectangle 5"/>
+              <a:t>YogaQ는 단순한 콘텐츠 플랫폼이 아닙니다 — 20년 전문가 지식을 500ms 이내에 처리하는 딥테크 RAG 엔진입니다.</a:t>
+            </a:r>
+          </a:p>
+        </p:txBody>
+      </p:sp>
+      <p:sp>
+        <p:nvSpPr>
+          <p:cNvPr id="7" name="Rounded Rectangle 6"/>
           <p:cNvSpPr/>
           <p:nvPr/>
         </p:nvSpPr>
         <p:spPr>
           <a:xfrm>
-            <a:off x="731520" y="4937760"/>
+            <a:off x="731520" y="5303520"/>
             <a:ext cx="1463040" cy="292608"/>
           </a:xfrm>
           <a:prstGeom prst="roundRect">
@@ -6821,13 +6950,13 @@
       </p:sp>
       <p:sp>
         <p:nvSpPr>
-          <p:cNvPr id="7" name="Rounded Rectangle 6"/>
+          <p:cNvPr id="8" name="Rounded Rectangle 7"/>
           <p:cNvSpPr/>
           <p:nvPr/>
         </p:nvSpPr>
         <p:spPr>
           <a:xfrm>
-            <a:off x="3657600" y="4937760"/>
+            <a:off x="3657600" y="5303520"/>
             <a:ext cx="1188720" cy="292608"/>
           </a:xfrm>
           <a:prstGeom prst="roundRect">
@@ -6875,7 +7004,61 @@
       </p:sp>
       <p:sp>
         <p:nvSpPr>
-          <p:cNvPr id="8" name="TextBox 7"/>
+          <p:cNvPr id="9" name="Rounded Rectangle 8"/>
+          <p:cNvSpPr/>
+          <p:nvPr/>
+        </p:nvSpPr>
+        <p:spPr>
+          <a:xfrm>
+            <a:off x="6035040" y="5303520"/>
+            <a:ext cx="1188720" cy="292608"/>
+          </a:xfrm>
+          <a:prstGeom prst="roundRect">
+            <a:avLst>
+              <a:gd name="adj" fmla="val 50000"/>
+            </a:avLst>
+          </a:prstGeom>
+          <a:solidFill>
+            <a:srgbClr val="161F33"/>
+          </a:solidFill>
+          <a:ln>
+            <a:noFill/>
+          </a:ln>
+        </p:spPr>
+        <p:style>
+          <a:lnRef idx="1">
+            <a:schemeClr val="accent1"/>
+          </a:lnRef>
+          <a:fillRef idx="3">
+            <a:schemeClr val="accent1"/>
+          </a:fillRef>
+          <a:effectRef idx="2">
+            <a:schemeClr val="accent1"/>
+          </a:effectRef>
+          <a:fontRef idx="minor">
+            <a:schemeClr val="lt1"/>
+          </a:fontRef>
+        </p:style>
+        <p:txBody>
+          <a:bodyPr rtlCol="0" anchor="ctr" lIns="109728" rIns="109728" tIns="0" bIns="0"/>
+          <a:lstStyle/>
+          <a:p>
+            <a:pPr algn="ctr"/>
+            <a:r>
+              <a:rPr sz="1000" b="1">
+                <a:solidFill>
+                  <a:srgbClr val="3DD9C2"/>
+                </a:solidFill>
+                <a:latin typeface="Inter"/>
+              </a:rPr>
+              <a:t>hello@yogaman.club</a:t>
+            </a:r>
+          </a:p>
+        </p:txBody>
+      </p:sp>
+      <p:sp>
+        <p:nvSpPr>
+          <p:cNvPr id="10" name="TextBox 9"/>
           <p:cNvSpPr txBox="1"/>
           <p:nvPr/>
         </p:nvSpPr>
@@ -6910,7 +7093,7 @@
       </p:sp>
       <p:sp>
         <p:nvSpPr>
-          <p:cNvPr id="9" name="TextBox 8"/>
+          <p:cNvPr id="11" name="TextBox 10"/>
           <p:cNvSpPr txBox="1"/>
           <p:nvPr/>
         </p:nvSpPr>
